--- a/media/Presentation1.pptx
+++ b/media/Presentation1.pptx
@@ -104,6 +104,11 @@
       </a:defRPr>
     </a:lvl9pPr>
   </p:defaultTextStyle>
+  <p:extLst>
+    <p:ext uri="{EFAFB233-063F-42B5-8137-9DF3F51BA10A}">
+      <p15:sldGuideLst xmlns:p15="http://schemas.microsoft.com/office/powerpoint/2012/main"/>
+    </p:ext>
+  </p:extLst>
 </p:presentation>
 </file>
 
@@ -3336,7 +3341,7 @@
           <p:nvPr>
             <p:extLst>
               <p:ext uri="{D42A27DB-BD31-4B8C-83A1-F6EECF244321}">
-                <p14:modId xmlns:p14="http://schemas.microsoft.com/office/powerpoint/2010/main" val="1331485401"/>
+                <p14:modId xmlns:p14="http://schemas.microsoft.com/office/powerpoint/2010/main" val="1442385769"/>
               </p:ext>
             </p:extLst>
           </p:nvPr>
@@ -5360,6 +5365,1933 @@
           </a:p>
         </p:txBody>
       </p:sp>
+      <p:graphicFrame>
+        <p:nvGraphicFramePr>
+          <p:cNvPr id="4" name="Table 3">
+            <a:extLst>
+              <a:ext uri="{FF2B5EF4-FFF2-40B4-BE49-F238E27FC236}">
+                <a16:creationId xmlns:a16="http://schemas.microsoft.com/office/drawing/2014/main" id="{08AEB7D5-7941-AA66-D200-987AE5317259}"/>
+              </a:ext>
+            </a:extLst>
+          </p:cNvPr>
+          <p:cNvGraphicFramePr>
+            <a:graphicFrameLocks noGrp="1"/>
+          </p:cNvGraphicFramePr>
+          <p:nvPr>
+            <p:extLst>
+              <p:ext uri="{D42A27DB-BD31-4B8C-83A1-F6EECF244321}">
+                <p14:modId xmlns:p14="http://schemas.microsoft.com/office/powerpoint/2010/main" val="3663810843"/>
+              </p:ext>
+            </p:extLst>
+          </p:nvPr>
+        </p:nvGraphicFramePr>
+        <p:xfrm>
+          <a:off x="4419191" y="1013551"/>
+          <a:ext cx="1505202" cy="1586430"/>
+        </p:xfrm>
+        <a:graphic>
+          <a:graphicData uri="http://schemas.openxmlformats.org/drawingml/2006/table">
+            <a:tbl>
+              <a:tblPr>
+                <a:tableStyleId>{5C22544A-7EE6-4342-B048-85BDC9FD1C3A}</a:tableStyleId>
+              </a:tblPr>
+              <a:tblGrid>
+                <a:gridCol w="250867">
+                  <a:extLst>
+                    <a:ext uri="{9D8B030D-6E8A-4147-A177-3AD203B41FA5}">
+                      <a16:colId xmlns:a16="http://schemas.microsoft.com/office/drawing/2014/main" val="2911984273"/>
+                    </a:ext>
+                  </a:extLst>
+                </a:gridCol>
+                <a:gridCol w="250867">
+                  <a:extLst>
+                    <a:ext uri="{9D8B030D-6E8A-4147-A177-3AD203B41FA5}">
+                      <a16:colId xmlns:a16="http://schemas.microsoft.com/office/drawing/2014/main" val="1127940416"/>
+                    </a:ext>
+                  </a:extLst>
+                </a:gridCol>
+                <a:gridCol w="250867">
+                  <a:extLst>
+                    <a:ext uri="{9D8B030D-6E8A-4147-A177-3AD203B41FA5}">
+                      <a16:colId xmlns:a16="http://schemas.microsoft.com/office/drawing/2014/main" val="1438800321"/>
+                    </a:ext>
+                  </a:extLst>
+                </a:gridCol>
+                <a:gridCol w="250867">
+                  <a:extLst>
+                    <a:ext uri="{9D8B030D-6E8A-4147-A177-3AD203B41FA5}">
+                      <a16:colId xmlns:a16="http://schemas.microsoft.com/office/drawing/2014/main" val="1330743069"/>
+                    </a:ext>
+                  </a:extLst>
+                </a:gridCol>
+                <a:gridCol w="250867">
+                  <a:extLst>
+                    <a:ext uri="{9D8B030D-6E8A-4147-A177-3AD203B41FA5}">
+                      <a16:colId xmlns:a16="http://schemas.microsoft.com/office/drawing/2014/main" val="1379473990"/>
+                    </a:ext>
+                  </a:extLst>
+                </a:gridCol>
+                <a:gridCol w="250867">
+                  <a:extLst>
+                    <a:ext uri="{9D8B030D-6E8A-4147-A177-3AD203B41FA5}">
+                      <a16:colId xmlns:a16="http://schemas.microsoft.com/office/drawing/2014/main" val="2472479932"/>
+                    </a:ext>
+                  </a:extLst>
+                </a:gridCol>
+              </a:tblGrid>
+              <a:tr h="264405">
+                <a:tc>
+                  <a:txBody>
+                    <a:bodyPr/>
+                    <a:lstStyle/>
+                    <a:p>
+                      <a:endParaRPr lang="en-US" sz="1300" dirty="0"/>
+                    </a:p>
+                  </a:txBody>
+                  <a:tcPr marL="66101" marR="66101" marT="33051" marB="33051">
+                    <a:lnL w="38100" cap="flat" cmpd="sng" algn="ctr">
+                      <a:solidFill>
+                        <a:schemeClr val="tx1">
+                          <a:lumMod val="65000"/>
+                          <a:lumOff val="35000"/>
+                        </a:schemeClr>
+                      </a:solidFill>
+                      <a:prstDash val="solid"/>
+                      <a:round/>
+                      <a:headEnd type="none" w="med" len="med"/>
+                      <a:tailEnd type="none" w="med" len="med"/>
+                    </a:lnL>
+                    <a:lnR w="38100" cap="flat" cmpd="sng" algn="ctr">
+                      <a:solidFill>
+                        <a:schemeClr val="tx1">
+                          <a:lumMod val="65000"/>
+                          <a:lumOff val="35000"/>
+                        </a:schemeClr>
+                      </a:solidFill>
+                      <a:prstDash val="solid"/>
+                      <a:round/>
+                      <a:headEnd type="none" w="med" len="med"/>
+                      <a:tailEnd type="none" w="med" len="med"/>
+                    </a:lnR>
+                    <a:lnT w="38100" cap="flat" cmpd="sng" algn="ctr">
+                      <a:solidFill>
+                        <a:schemeClr val="tx1">
+                          <a:lumMod val="65000"/>
+                          <a:lumOff val="35000"/>
+                        </a:schemeClr>
+                      </a:solidFill>
+                      <a:prstDash val="solid"/>
+                      <a:round/>
+                      <a:headEnd type="none" w="med" len="med"/>
+                      <a:tailEnd type="none" w="med" len="med"/>
+                    </a:lnT>
+                    <a:lnB w="38100" cap="flat" cmpd="sng" algn="ctr">
+                      <a:solidFill>
+                        <a:schemeClr val="tx1">
+                          <a:lumMod val="65000"/>
+                          <a:lumOff val="35000"/>
+                        </a:schemeClr>
+                      </a:solidFill>
+                      <a:prstDash val="solid"/>
+                      <a:round/>
+                      <a:headEnd type="none" w="med" len="med"/>
+                      <a:tailEnd type="none" w="med" len="med"/>
+                    </a:lnB>
+                    <a:lnTlToBr w="12700" cmpd="sng">
+                      <a:noFill/>
+                      <a:prstDash val="solid"/>
+                    </a:lnTlToBr>
+                    <a:lnBlToTr w="12700" cmpd="sng">
+                      <a:noFill/>
+                      <a:prstDash val="solid"/>
+                    </a:lnBlToTr>
+                    <a:solidFill>
+                      <a:schemeClr val="bg1"/>
+                    </a:solidFill>
+                  </a:tcPr>
+                </a:tc>
+                <a:tc>
+                  <a:txBody>
+                    <a:bodyPr/>
+                    <a:lstStyle/>
+                    <a:p>
+                      <a:endParaRPr lang="en-US" sz="1300" dirty="0"/>
+                    </a:p>
+                  </a:txBody>
+                  <a:tcPr marL="66101" marR="66101" marT="33051" marB="33051">
+                    <a:lnL w="38100" cap="flat" cmpd="sng" algn="ctr">
+                      <a:solidFill>
+                        <a:schemeClr val="tx1">
+                          <a:lumMod val="65000"/>
+                          <a:lumOff val="35000"/>
+                        </a:schemeClr>
+                      </a:solidFill>
+                      <a:prstDash val="solid"/>
+                      <a:round/>
+                      <a:headEnd type="none" w="med" len="med"/>
+                      <a:tailEnd type="none" w="med" len="med"/>
+                    </a:lnL>
+                    <a:lnR w="12700" cap="flat" cmpd="sng" algn="ctr">
+                      <a:noFill/>
+                      <a:prstDash val="solid"/>
+                      <a:round/>
+                      <a:headEnd type="none" w="med" len="med"/>
+                      <a:tailEnd type="none" w="med" len="med"/>
+                    </a:lnR>
+                    <a:lnT w="28575" cap="flat" cmpd="sng" algn="ctr">
+                      <a:noFill/>
+                      <a:prstDash val="solid"/>
+                      <a:round/>
+                      <a:headEnd type="none" w="med" len="med"/>
+                      <a:tailEnd type="none" w="med" len="med"/>
+                    </a:lnT>
+                    <a:lnB w="12700" cap="flat" cmpd="sng" algn="ctr">
+                      <a:noFill/>
+                      <a:prstDash val="solid"/>
+                      <a:round/>
+                      <a:headEnd type="none" w="med" len="med"/>
+                      <a:tailEnd type="none" w="med" len="med"/>
+                    </a:lnB>
+                    <a:lnTlToBr w="12700" cmpd="sng">
+                      <a:noFill/>
+                      <a:prstDash val="solid"/>
+                    </a:lnTlToBr>
+                    <a:lnBlToTr w="12700" cmpd="sng">
+                      <a:noFill/>
+                      <a:prstDash val="solid"/>
+                    </a:lnBlToTr>
+                    <a:solidFill>
+                      <a:srgbClr val="FFFFFF"/>
+                    </a:solidFill>
+                  </a:tcPr>
+                </a:tc>
+                <a:tc>
+                  <a:txBody>
+                    <a:bodyPr/>
+                    <a:lstStyle/>
+                    <a:p>
+                      <a:endParaRPr lang="en-US" sz="1300" dirty="0"/>
+                    </a:p>
+                  </a:txBody>
+                  <a:tcPr marL="66101" marR="66101" marT="33051" marB="33051">
+                    <a:lnL w="12700" cap="flat" cmpd="sng" algn="ctr">
+                      <a:noFill/>
+                      <a:prstDash val="solid"/>
+                      <a:round/>
+                      <a:headEnd type="none" w="med" len="med"/>
+                      <a:tailEnd type="none" w="med" len="med"/>
+                    </a:lnL>
+                    <a:lnR w="12700" cap="flat" cmpd="sng" algn="ctr">
+                      <a:noFill/>
+                      <a:prstDash val="solid"/>
+                      <a:round/>
+                      <a:headEnd type="none" w="med" len="med"/>
+                      <a:tailEnd type="none" w="med" len="med"/>
+                    </a:lnR>
+                    <a:lnT w="28575" cap="flat" cmpd="sng" algn="ctr">
+                      <a:noFill/>
+                      <a:prstDash val="solid"/>
+                      <a:round/>
+                      <a:headEnd type="none" w="med" len="med"/>
+                      <a:tailEnd type="none" w="med" len="med"/>
+                    </a:lnT>
+                    <a:lnB w="12700" cap="flat" cmpd="sng" algn="ctr">
+                      <a:noFill/>
+                      <a:prstDash val="solid"/>
+                      <a:round/>
+                      <a:headEnd type="none" w="med" len="med"/>
+                      <a:tailEnd type="none" w="med" len="med"/>
+                    </a:lnB>
+                    <a:lnTlToBr w="12700" cmpd="sng">
+                      <a:noFill/>
+                      <a:prstDash val="solid"/>
+                    </a:lnTlToBr>
+                    <a:lnBlToTr w="12700" cmpd="sng">
+                      <a:noFill/>
+                      <a:prstDash val="solid"/>
+                    </a:lnBlToTr>
+                    <a:solidFill>
+                      <a:srgbClr val="FBFBFB"/>
+                    </a:solidFill>
+                  </a:tcPr>
+                </a:tc>
+                <a:tc>
+                  <a:txBody>
+                    <a:bodyPr/>
+                    <a:lstStyle/>
+                    <a:p>
+                      <a:endParaRPr lang="en-US" sz="1300" dirty="0"/>
+                    </a:p>
+                  </a:txBody>
+                  <a:tcPr marL="66101" marR="66101" marT="33051" marB="33051">
+                    <a:lnL w="12700" cap="flat" cmpd="sng" algn="ctr">
+                      <a:noFill/>
+                      <a:prstDash val="solid"/>
+                      <a:round/>
+                      <a:headEnd type="none" w="med" len="med"/>
+                      <a:tailEnd type="none" w="med" len="med"/>
+                    </a:lnL>
+                    <a:lnR w="12700" cap="flat" cmpd="sng" algn="ctr">
+                      <a:noFill/>
+                      <a:prstDash val="solid"/>
+                      <a:round/>
+                      <a:headEnd type="none" w="med" len="med"/>
+                      <a:tailEnd type="none" w="med" len="med"/>
+                    </a:lnR>
+                    <a:lnT w="28575" cap="flat" cmpd="sng" algn="ctr">
+                      <a:noFill/>
+                      <a:prstDash val="solid"/>
+                      <a:round/>
+                      <a:headEnd type="none" w="med" len="med"/>
+                      <a:tailEnd type="none" w="med" len="med"/>
+                    </a:lnT>
+                    <a:lnB w="12700" cap="flat" cmpd="sng" algn="ctr">
+                      <a:noFill/>
+                      <a:prstDash val="solid"/>
+                      <a:round/>
+                      <a:headEnd type="none" w="med" len="med"/>
+                      <a:tailEnd type="none" w="med" len="med"/>
+                    </a:lnB>
+                    <a:lnTlToBr w="12700" cmpd="sng">
+                      <a:noFill/>
+                      <a:prstDash val="solid"/>
+                    </a:lnTlToBr>
+                    <a:lnBlToTr w="12700" cmpd="sng">
+                      <a:noFill/>
+                      <a:prstDash val="solid"/>
+                    </a:lnBlToTr>
+                    <a:solidFill>
+                      <a:srgbClr val="FBFBFB"/>
+                    </a:solidFill>
+                  </a:tcPr>
+                </a:tc>
+                <a:tc>
+                  <a:txBody>
+                    <a:bodyPr/>
+                    <a:lstStyle/>
+                    <a:p>
+                      <a:endParaRPr lang="en-US" sz="1300" dirty="0"/>
+                    </a:p>
+                  </a:txBody>
+                  <a:tcPr marL="66101" marR="66101" marT="33051" marB="33051">
+                    <a:lnL w="12700" cap="flat" cmpd="sng" algn="ctr">
+                      <a:noFill/>
+                      <a:prstDash val="solid"/>
+                      <a:round/>
+                      <a:headEnd type="none" w="med" len="med"/>
+                      <a:tailEnd type="none" w="med" len="med"/>
+                    </a:lnL>
+                    <a:lnR w="12700" cap="flat" cmpd="sng" algn="ctr">
+                      <a:noFill/>
+                      <a:prstDash val="solid"/>
+                      <a:round/>
+                      <a:headEnd type="none" w="med" len="med"/>
+                      <a:tailEnd type="none" w="med" len="med"/>
+                    </a:lnR>
+                    <a:lnT w="28575" cap="flat" cmpd="sng" algn="ctr">
+                      <a:noFill/>
+                      <a:prstDash val="solid"/>
+                      <a:round/>
+                      <a:headEnd type="none" w="med" len="med"/>
+                      <a:tailEnd type="none" w="med" len="med"/>
+                    </a:lnT>
+                    <a:lnB w="12700" cap="flat" cmpd="sng" algn="ctr">
+                      <a:noFill/>
+                      <a:prstDash val="solid"/>
+                      <a:round/>
+                      <a:headEnd type="none" w="med" len="med"/>
+                      <a:tailEnd type="none" w="med" len="med"/>
+                    </a:lnB>
+                    <a:lnTlToBr w="12700" cmpd="sng">
+                      <a:noFill/>
+                      <a:prstDash val="solid"/>
+                    </a:lnTlToBr>
+                    <a:lnBlToTr w="12700" cmpd="sng">
+                      <a:noFill/>
+                      <a:prstDash val="solid"/>
+                    </a:lnBlToTr>
+                    <a:solidFill>
+                      <a:srgbClr val="EDF3F0"/>
+                    </a:solidFill>
+                  </a:tcPr>
+                </a:tc>
+                <a:tc>
+                  <a:txBody>
+                    <a:bodyPr/>
+                    <a:lstStyle/>
+                    <a:p>
+                      <a:endParaRPr lang="en-US" sz="1300" dirty="0"/>
+                    </a:p>
+                  </a:txBody>
+                  <a:tcPr marL="66101" marR="66101" marT="33051" marB="33051">
+                    <a:lnL w="12700" cap="flat" cmpd="sng" algn="ctr">
+                      <a:noFill/>
+                      <a:prstDash val="solid"/>
+                      <a:round/>
+                      <a:headEnd type="none" w="med" len="med"/>
+                      <a:tailEnd type="none" w="med" len="med"/>
+                    </a:lnL>
+                    <a:lnR w="28575" cap="flat" cmpd="sng" algn="ctr">
+                      <a:noFill/>
+                      <a:prstDash val="solid"/>
+                      <a:round/>
+                      <a:headEnd type="none" w="med" len="med"/>
+                      <a:tailEnd type="none" w="med" len="med"/>
+                    </a:lnR>
+                    <a:lnT w="28575" cap="flat" cmpd="sng" algn="ctr">
+                      <a:noFill/>
+                      <a:prstDash val="solid"/>
+                      <a:round/>
+                      <a:headEnd type="none" w="med" len="med"/>
+                      <a:tailEnd type="none" w="med" len="med"/>
+                    </a:lnT>
+                    <a:lnB w="12700" cap="flat" cmpd="sng" algn="ctr">
+                      <a:noFill/>
+                      <a:prstDash val="solid"/>
+                      <a:round/>
+                      <a:headEnd type="none" w="med" len="med"/>
+                      <a:tailEnd type="none" w="med" len="med"/>
+                    </a:lnB>
+                    <a:lnTlToBr w="12700" cmpd="sng">
+                      <a:noFill/>
+                      <a:prstDash val="solid"/>
+                    </a:lnTlToBr>
+                    <a:lnBlToTr w="12700" cmpd="sng">
+                      <a:noFill/>
+                      <a:prstDash val="solid"/>
+                    </a:lnBlToTr>
+                    <a:solidFill>
+                      <a:schemeClr val="accent6">
+                        <a:lumMod val="20000"/>
+                        <a:lumOff val="80000"/>
+                      </a:schemeClr>
+                    </a:solidFill>
+                  </a:tcPr>
+                </a:tc>
+                <a:extLst>
+                  <a:ext uri="{0D108BD9-81ED-4DB2-BD59-A6C34878D82A}">
+                    <a16:rowId xmlns:a16="http://schemas.microsoft.com/office/drawing/2014/main" val="1370451573"/>
+                  </a:ext>
+                </a:extLst>
+              </a:tr>
+              <a:tr h="264405">
+                <a:tc>
+                  <a:txBody>
+                    <a:bodyPr/>
+                    <a:lstStyle/>
+                    <a:p>
+                      <a:endParaRPr lang="en-US" sz="1300" dirty="0"/>
+                    </a:p>
+                  </a:txBody>
+                  <a:tcPr marL="66101" marR="66101" marT="33051" marB="33051">
+                    <a:lnL w="28575" cap="flat" cmpd="sng" algn="ctr">
+                      <a:noFill/>
+                      <a:prstDash val="solid"/>
+                      <a:round/>
+                      <a:headEnd type="none" w="med" len="med"/>
+                      <a:tailEnd type="none" w="med" len="med"/>
+                    </a:lnL>
+                    <a:lnR w="12700" cap="flat" cmpd="sng" algn="ctr">
+                      <a:noFill/>
+                      <a:prstDash val="solid"/>
+                      <a:round/>
+                      <a:headEnd type="none" w="med" len="med"/>
+                      <a:tailEnd type="none" w="med" len="med"/>
+                    </a:lnR>
+                    <a:lnT w="38100" cap="flat" cmpd="sng" algn="ctr">
+                      <a:solidFill>
+                        <a:schemeClr val="tx1">
+                          <a:lumMod val="65000"/>
+                          <a:lumOff val="35000"/>
+                        </a:schemeClr>
+                      </a:solidFill>
+                      <a:prstDash val="solid"/>
+                      <a:round/>
+                      <a:headEnd type="none" w="med" len="med"/>
+                      <a:tailEnd type="none" w="med" len="med"/>
+                    </a:lnT>
+                    <a:lnB w="12700" cap="flat" cmpd="sng" algn="ctr">
+                      <a:noFill/>
+                      <a:prstDash val="solid"/>
+                      <a:round/>
+                      <a:headEnd type="none" w="med" len="med"/>
+                      <a:tailEnd type="none" w="med" len="med"/>
+                    </a:lnB>
+                    <a:lnTlToBr w="12700" cmpd="sng">
+                      <a:noFill/>
+                      <a:prstDash val="solid"/>
+                    </a:lnTlToBr>
+                    <a:lnBlToTr w="12700" cmpd="sng">
+                      <a:noFill/>
+                      <a:prstDash val="solid"/>
+                    </a:lnBlToTr>
+                    <a:solidFill>
+                      <a:srgbClr val="FFFFFF"/>
+                    </a:solidFill>
+                  </a:tcPr>
+                </a:tc>
+                <a:tc>
+                  <a:txBody>
+                    <a:bodyPr/>
+                    <a:lstStyle/>
+                    <a:p>
+                      <a:endParaRPr lang="en-US" sz="1300" dirty="0"/>
+                    </a:p>
+                  </a:txBody>
+                  <a:tcPr marL="66101" marR="66101" marT="33051" marB="33051">
+                    <a:lnL w="12700" cap="flat" cmpd="sng" algn="ctr">
+                      <a:noFill/>
+                      <a:prstDash val="solid"/>
+                      <a:round/>
+                      <a:headEnd type="none" w="med" len="med"/>
+                      <a:tailEnd type="none" w="med" len="med"/>
+                    </a:lnL>
+                    <a:lnR w="12700" cap="flat" cmpd="sng" algn="ctr">
+                      <a:noFill/>
+                      <a:prstDash val="solid"/>
+                      <a:round/>
+                      <a:headEnd type="none" w="med" len="med"/>
+                      <a:tailEnd type="none" w="med" len="med"/>
+                    </a:lnR>
+                    <a:lnT w="12700" cap="flat" cmpd="sng" algn="ctr">
+                      <a:noFill/>
+                      <a:prstDash val="solid"/>
+                      <a:round/>
+                      <a:headEnd type="none" w="med" len="med"/>
+                      <a:tailEnd type="none" w="med" len="med"/>
+                    </a:lnT>
+                    <a:lnB w="12700" cap="flat" cmpd="sng" algn="ctr">
+                      <a:noFill/>
+                      <a:prstDash val="solid"/>
+                      <a:round/>
+                      <a:headEnd type="none" w="med" len="med"/>
+                      <a:tailEnd type="none" w="med" len="med"/>
+                    </a:lnB>
+                    <a:lnTlToBr w="12700" cmpd="sng">
+                      <a:noFill/>
+                      <a:prstDash val="solid"/>
+                    </a:lnTlToBr>
+                    <a:lnBlToTr w="12700" cmpd="sng">
+                      <a:noFill/>
+                      <a:prstDash val="solid"/>
+                    </a:lnBlToTr>
+                    <a:solidFill>
+                      <a:srgbClr val="FBFBFB"/>
+                    </a:solidFill>
+                  </a:tcPr>
+                </a:tc>
+                <a:tc>
+                  <a:txBody>
+                    <a:bodyPr/>
+                    <a:lstStyle/>
+                    <a:p>
+                      <a:endParaRPr lang="en-US" sz="1300" dirty="0"/>
+                    </a:p>
+                  </a:txBody>
+                  <a:tcPr marL="66101" marR="66101" marT="33051" marB="33051">
+                    <a:lnL w="12700" cap="flat" cmpd="sng" algn="ctr">
+                      <a:noFill/>
+                      <a:prstDash val="solid"/>
+                      <a:round/>
+                      <a:headEnd type="none" w="med" len="med"/>
+                      <a:tailEnd type="none" w="med" len="med"/>
+                    </a:lnL>
+                    <a:lnR w="12700" cap="flat" cmpd="sng" algn="ctr">
+                      <a:noFill/>
+                      <a:prstDash val="solid"/>
+                      <a:round/>
+                      <a:headEnd type="none" w="med" len="med"/>
+                      <a:tailEnd type="none" w="med" len="med"/>
+                    </a:lnR>
+                    <a:lnT w="12700" cap="flat" cmpd="sng" algn="ctr">
+                      <a:noFill/>
+                      <a:prstDash val="solid"/>
+                      <a:round/>
+                      <a:headEnd type="none" w="med" len="med"/>
+                      <a:tailEnd type="none" w="med" len="med"/>
+                    </a:lnT>
+                    <a:lnB w="12700" cap="flat" cmpd="sng" algn="ctr">
+                      <a:noFill/>
+                      <a:prstDash val="solid"/>
+                      <a:round/>
+                      <a:headEnd type="none" w="med" len="med"/>
+                      <a:tailEnd type="none" w="med" len="med"/>
+                    </a:lnB>
+                    <a:lnTlToBr w="12700" cmpd="sng">
+                      <a:noFill/>
+                      <a:prstDash val="solid"/>
+                    </a:lnTlToBr>
+                    <a:lnBlToTr w="12700" cmpd="sng">
+                      <a:noFill/>
+                      <a:prstDash val="solid"/>
+                    </a:lnBlToTr>
+                    <a:solidFill>
+                      <a:srgbClr val="FBFBFB"/>
+                    </a:solidFill>
+                  </a:tcPr>
+                </a:tc>
+                <a:tc>
+                  <a:txBody>
+                    <a:bodyPr/>
+                    <a:lstStyle/>
+                    <a:p>
+                      <a:endParaRPr lang="en-US" sz="1300" dirty="0"/>
+                    </a:p>
+                  </a:txBody>
+                  <a:tcPr marL="66101" marR="66101" marT="33051" marB="33051">
+                    <a:lnL w="12700" cap="flat" cmpd="sng" algn="ctr">
+                      <a:noFill/>
+                      <a:prstDash val="solid"/>
+                      <a:round/>
+                      <a:headEnd type="none" w="med" len="med"/>
+                      <a:tailEnd type="none" w="med" len="med"/>
+                    </a:lnL>
+                    <a:lnR w="12700" cap="flat" cmpd="sng" algn="ctr">
+                      <a:noFill/>
+                      <a:prstDash val="solid"/>
+                      <a:round/>
+                      <a:headEnd type="none" w="med" len="med"/>
+                      <a:tailEnd type="none" w="med" len="med"/>
+                    </a:lnR>
+                    <a:lnT w="12700" cap="flat" cmpd="sng" algn="ctr">
+                      <a:noFill/>
+                      <a:prstDash val="solid"/>
+                      <a:round/>
+                      <a:headEnd type="none" w="med" len="med"/>
+                      <a:tailEnd type="none" w="med" len="med"/>
+                    </a:lnT>
+                    <a:lnB w="12700" cap="flat" cmpd="sng" algn="ctr">
+                      <a:noFill/>
+                      <a:prstDash val="solid"/>
+                      <a:round/>
+                      <a:headEnd type="none" w="med" len="med"/>
+                      <a:tailEnd type="none" w="med" len="med"/>
+                    </a:lnB>
+                    <a:lnTlToBr w="12700" cmpd="sng">
+                      <a:noFill/>
+                      <a:prstDash val="solid"/>
+                    </a:lnTlToBr>
+                    <a:lnBlToTr w="12700" cmpd="sng">
+                      <a:noFill/>
+                      <a:prstDash val="solid"/>
+                    </a:lnBlToTr>
+                    <a:solidFill>
+                      <a:srgbClr val="EDF3F0"/>
+                    </a:solidFill>
+                  </a:tcPr>
+                </a:tc>
+                <a:tc>
+                  <a:txBody>
+                    <a:bodyPr/>
+                    <a:lstStyle/>
+                    <a:p>
+                      <a:endParaRPr lang="en-US" sz="1300" dirty="0"/>
+                    </a:p>
+                  </a:txBody>
+                  <a:tcPr marL="66101" marR="66101" marT="33051" marB="33051">
+                    <a:lnL w="12700" cap="flat" cmpd="sng" algn="ctr">
+                      <a:noFill/>
+                      <a:prstDash val="solid"/>
+                      <a:round/>
+                      <a:headEnd type="none" w="med" len="med"/>
+                      <a:tailEnd type="none" w="med" len="med"/>
+                    </a:lnL>
+                    <a:lnR w="12700" cap="flat" cmpd="sng" algn="ctr">
+                      <a:noFill/>
+                      <a:prstDash val="solid"/>
+                      <a:round/>
+                      <a:headEnd type="none" w="med" len="med"/>
+                      <a:tailEnd type="none" w="med" len="med"/>
+                    </a:lnR>
+                    <a:lnT w="12700" cap="flat" cmpd="sng" algn="ctr">
+                      <a:noFill/>
+                      <a:prstDash val="solid"/>
+                      <a:round/>
+                      <a:headEnd type="none" w="med" len="med"/>
+                      <a:tailEnd type="none" w="med" len="med"/>
+                    </a:lnT>
+                    <a:lnB w="12700" cap="flat" cmpd="sng" algn="ctr">
+                      <a:noFill/>
+                      <a:prstDash val="solid"/>
+                      <a:round/>
+                      <a:headEnd type="none" w="med" len="med"/>
+                      <a:tailEnd type="none" w="med" len="med"/>
+                    </a:lnB>
+                    <a:lnTlToBr w="12700" cmpd="sng">
+                      <a:noFill/>
+                      <a:prstDash val="solid"/>
+                    </a:lnTlToBr>
+                    <a:lnBlToTr w="12700" cmpd="sng">
+                      <a:noFill/>
+                      <a:prstDash val="solid"/>
+                    </a:lnBlToTr>
+                    <a:solidFill>
+                      <a:schemeClr val="accent6">
+                        <a:lumMod val="20000"/>
+                        <a:lumOff val="80000"/>
+                      </a:schemeClr>
+                    </a:solidFill>
+                  </a:tcPr>
+                </a:tc>
+                <a:tc>
+                  <a:txBody>
+                    <a:bodyPr/>
+                    <a:lstStyle/>
+                    <a:p>
+                      <a:endParaRPr lang="en-US" sz="1300" dirty="0"/>
+                    </a:p>
+                  </a:txBody>
+                  <a:tcPr marL="66101" marR="66101" marT="33051" marB="33051">
+                    <a:lnL w="12700" cap="flat" cmpd="sng" algn="ctr">
+                      <a:noFill/>
+                      <a:prstDash val="solid"/>
+                      <a:round/>
+                      <a:headEnd type="none" w="med" len="med"/>
+                      <a:tailEnd type="none" w="med" len="med"/>
+                    </a:lnL>
+                    <a:lnR w="28575" cap="flat" cmpd="sng" algn="ctr">
+                      <a:noFill/>
+                      <a:prstDash val="solid"/>
+                      <a:round/>
+                      <a:headEnd type="none" w="med" len="med"/>
+                      <a:tailEnd type="none" w="med" len="med"/>
+                    </a:lnR>
+                    <a:lnT w="12700" cap="flat" cmpd="sng" algn="ctr">
+                      <a:noFill/>
+                      <a:prstDash val="solid"/>
+                      <a:round/>
+                      <a:headEnd type="none" w="med" len="med"/>
+                      <a:tailEnd type="none" w="med" len="med"/>
+                    </a:lnT>
+                    <a:lnB w="12700" cap="flat" cmpd="sng" algn="ctr">
+                      <a:noFill/>
+                      <a:prstDash val="solid"/>
+                      <a:round/>
+                      <a:headEnd type="none" w="med" len="med"/>
+                      <a:tailEnd type="none" w="med" len="med"/>
+                    </a:lnB>
+                    <a:lnTlToBr w="12700" cmpd="sng">
+                      <a:noFill/>
+                      <a:prstDash val="solid"/>
+                    </a:lnTlToBr>
+                    <a:lnBlToTr w="12700" cmpd="sng">
+                      <a:noFill/>
+                      <a:prstDash val="solid"/>
+                    </a:lnBlToTr>
+                    <a:solidFill>
+                      <a:schemeClr val="accent6">
+                        <a:lumMod val="40000"/>
+                        <a:lumOff val="60000"/>
+                      </a:schemeClr>
+                    </a:solidFill>
+                  </a:tcPr>
+                </a:tc>
+                <a:extLst>
+                  <a:ext uri="{0D108BD9-81ED-4DB2-BD59-A6C34878D82A}">
+                    <a16:rowId xmlns:a16="http://schemas.microsoft.com/office/drawing/2014/main" val="833339775"/>
+                  </a:ext>
+                </a:extLst>
+              </a:tr>
+              <a:tr h="264405">
+                <a:tc>
+                  <a:txBody>
+                    <a:bodyPr/>
+                    <a:lstStyle/>
+                    <a:p>
+                      <a:endParaRPr lang="en-US" sz="1300" dirty="0"/>
+                    </a:p>
+                  </a:txBody>
+                  <a:tcPr marL="66101" marR="66101" marT="33051" marB="33051">
+                    <a:lnL w="28575" cap="flat" cmpd="sng" algn="ctr">
+                      <a:noFill/>
+                      <a:prstDash val="solid"/>
+                      <a:round/>
+                      <a:headEnd type="none" w="med" len="med"/>
+                      <a:tailEnd type="none" w="med" len="med"/>
+                    </a:lnL>
+                    <a:lnR w="12700" cap="flat" cmpd="sng" algn="ctr">
+                      <a:noFill/>
+                      <a:prstDash val="solid"/>
+                      <a:round/>
+                      <a:headEnd type="none" w="med" len="med"/>
+                      <a:tailEnd type="none" w="med" len="med"/>
+                    </a:lnR>
+                    <a:lnT w="12700" cap="flat" cmpd="sng" algn="ctr">
+                      <a:noFill/>
+                      <a:prstDash val="solid"/>
+                      <a:round/>
+                      <a:headEnd type="none" w="med" len="med"/>
+                      <a:tailEnd type="none" w="med" len="med"/>
+                    </a:lnT>
+                    <a:lnB w="12700" cap="flat" cmpd="sng" algn="ctr">
+                      <a:noFill/>
+                      <a:prstDash val="solid"/>
+                      <a:round/>
+                      <a:headEnd type="none" w="med" len="med"/>
+                      <a:tailEnd type="none" w="med" len="med"/>
+                    </a:lnB>
+                    <a:lnTlToBr w="12700" cmpd="sng">
+                      <a:noFill/>
+                      <a:prstDash val="solid"/>
+                    </a:lnTlToBr>
+                    <a:lnBlToTr w="12700" cmpd="sng">
+                      <a:noFill/>
+                      <a:prstDash val="solid"/>
+                    </a:lnBlToTr>
+                    <a:solidFill>
+                      <a:srgbClr val="FBFBFB"/>
+                    </a:solidFill>
+                  </a:tcPr>
+                </a:tc>
+                <a:tc>
+                  <a:txBody>
+                    <a:bodyPr/>
+                    <a:lstStyle/>
+                    <a:p>
+                      <a:endParaRPr lang="en-US" sz="1300" dirty="0"/>
+                    </a:p>
+                  </a:txBody>
+                  <a:tcPr marL="66101" marR="66101" marT="33051" marB="33051">
+                    <a:lnL w="12700" cap="flat" cmpd="sng" algn="ctr">
+                      <a:noFill/>
+                      <a:prstDash val="solid"/>
+                      <a:round/>
+                      <a:headEnd type="none" w="med" len="med"/>
+                      <a:tailEnd type="none" w="med" len="med"/>
+                    </a:lnL>
+                    <a:lnR w="12700" cap="flat" cmpd="sng" algn="ctr">
+                      <a:noFill/>
+                      <a:prstDash val="solid"/>
+                      <a:round/>
+                      <a:headEnd type="none" w="med" len="med"/>
+                      <a:tailEnd type="none" w="med" len="med"/>
+                    </a:lnR>
+                    <a:lnT w="12700" cap="flat" cmpd="sng" algn="ctr">
+                      <a:noFill/>
+                      <a:prstDash val="solid"/>
+                      <a:round/>
+                      <a:headEnd type="none" w="med" len="med"/>
+                      <a:tailEnd type="none" w="med" len="med"/>
+                    </a:lnT>
+                    <a:lnB w="12700" cap="flat" cmpd="sng" algn="ctr">
+                      <a:noFill/>
+                      <a:prstDash val="solid"/>
+                      <a:round/>
+                      <a:headEnd type="none" w="med" len="med"/>
+                      <a:tailEnd type="none" w="med" len="med"/>
+                    </a:lnB>
+                    <a:lnTlToBr w="12700" cmpd="sng">
+                      <a:noFill/>
+                      <a:prstDash val="solid"/>
+                    </a:lnTlToBr>
+                    <a:lnBlToTr w="12700" cmpd="sng">
+                      <a:noFill/>
+                      <a:prstDash val="solid"/>
+                    </a:lnBlToTr>
+                    <a:solidFill>
+                      <a:srgbClr val="FBFBFB"/>
+                    </a:solidFill>
+                  </a:tcPr>
+                </a:tc>
+                <a:tc>
+                  <a:txBody>
+                    <a:bodyPr/>
+                    <a:lstStyle/>
+                    <a:p>
+                      <a:endParaRPr lang="en-US" sz="1300" dirty="0"/>
+                    </a:p>
+                  </a:txBody>
+                  <a:tcPr marL="66101" marR="66101" marT="33051" marB="33051">
+                    <a:lnL w="12700" cap="flat" cmpd="sng" algn="ctr">
+                      <a:noFill/>
+                      <a:prstDash val="solid"/>
+                      <a:round/>
+                      <a:headEnd type="none" w="med" len="med"/>
+                      <a:tailEnd type="none" w="med" len="med"/>
+                    </a:lnL>
+                    <a:lnR w="12700" cap="flat" cmpd="sng" algn="ctr">
+                      <a:noFill/>
+                      <a:prstDash val="solid"/>
+                      <a:round/>
+                      <a:headEnd type="none" w="med" len="med"/>
+                      <a:tailEnd type="none" w="med" len="med"/>
+                    </a:lnR>
+                    <a:lnT w="12700" cap="flat" cmpd="sng" algn="ctr">
+                      <a:noFill/>
+                      <a:prstDash val="solid"/>
+                      <a:round/>
+                      <a:headEnd type="none" w="med" len="med"/>
+                      <a:tailEnd type="none" w="med" len="med"/>
+                    </a:lnT>
+                    <a:lnB w="12700" cap="flat" cmpd="sng" algn="ctr">
+                      <a:noFill/>
+                      <a:prstDash val="solid"/>
+                      <a:round/>
+                      <a:headEnd type="none" w="med" len="med"/>
+                      <a:tailEnd type="none" w="med" len="med"/>
+                    </a:lnB>
+                    <a:lnTlToBr w="12700" cmpd="sng">
+                      <a:noFill/>
+                      <a:prstDash val="solid"/>
+                    </a:lnTlToBr>
+                    <a:lnBlToTr w="12700" cmpd="sng">
+                      <a:noFill/>
+                      <a:prstDash val="solid"/>
+                    </a:lnBlToTr>
+                    <a:solidFill>
+                      <a:srgbClr val="EDF3F0"/>
+                    </a:solidFill>
+                  </a:tcPr>
+                </a:tc>
+                <a:tc>
+                  <a:txBody>
+                    <a:bodyPr/>
+                    <a:lstStyle/>
+                    <a:p>
+                      <a:endParaRPr lang="en-US" sz="1300" dirty="0"/>
+                    </a:p>
+                  </a:txBody>
+                  <a:tcPr marL="66101" marR="66101" marT="33051" marB="33051">
+                    <a:lnL w="12700" cap="flat" cmpd="sng" algn="ctr">
+                      <a:noFill/>
+                      <a:prstDash val="solid"/>
+                      <a:round/>
+                      <a:headEnd type="none" w="med" len="med"/>
+                      <a:tailEnd type="none" w="med" len="med"/>
+                    </a:lnL>
+                    <a:lnR w="12700" cap="flat" cmpd="sng" algn="ctr">
+                      <a:noFill/>
+                      <a:prstDash val="solid"/>
+                      <a:round/>
+                      <a:headEnd type="none" w="med" len="med"/>
+                      <a:tailEnd type="none" w="med" len="med"/>
+                    </a:lnR>
+                    <a:lnT w="12700" cap="flat" cmpd="sng" algn="ctr">
+                      <a:noFill/>
+                      <a:prstDash val="solid"/>
+                      <a:round/>
+                      <a:headEnd type="none" w="med" len="med"/>
+                      <a:tailEnd type="none" w="med" len="med"/>
+                    </a:lnT>
+                    <a:lnB w="12700" cap="flat" cmpd="sng" algn="ctr">
+                      <a:noFill/>
+                      <a:prstDash val="solid"/>
+                      <a:round/>
+                      <a:headEnd type="none" w="med" len="med"/>
+                      <a:tailEnd type="none" w="med" len="med"/>
+                    </a:lnB>
+                    <a:lnTlToBr w="12700" cmpd="sng">
+                      <a:noFill/>
+                      <a:prstDash val="solid"/>
+                    </a:lnTlToBr>
+                    <a:lnBlToTr w="12700" cmpd="sng">
+                      <a:noFill/>
+                      <a:prstDash val="solid"/>
+                    </a:lnBlToTr>
+                    <a:solidFill>
+                      <a:schemeClr val="accent6">
+                        <a:lumMod val="20000"/>
+                        <a:lumOff val="80000"/>
+                      </a:schemeClr>
+                    </a:solidFill>
+                  </a:tcPr>
+                </a:tc>
+                <a:tc>
+                  <a:txBody>
+                    <a:bodyPr/>
+                    <a:lstStyle/>
+                    <a:p>
+                      <a:endParaRPr lang="en-US" sz="1300" dirty="0"/>
+                    </a:p>
+                  </a:txBody>
+                  <a:tcPr marL="66101" marR="66101" marT="33051" marB="33051">
+                    <a:lnL w="12700" cap="flat" cmpd="sng" algn="ctr">
+                      <a:noFill/>
+                      <a:prstDash val="solid"/>
+                      <a:round/>
+                      <a:headEnd type="none" w="med" len="med"/>
+                      <a:tailEnd type="none" w="med" len="med"/>
+                    </a:lnL>
+                    <a:lnR w="12700" cap="flat" cmpd="sng" algn="ctr">
+                      <a:noFill/>
+                      <a:prstDash val="solid"/>
+                      <a:round/>
+                      <a:headEnd type="none" w="med" len="med"/>
+                      <a:tailEnd type="none" w="med" len="med"/>
+                    </a:lnR>
+                    <a:lnT w="12700" cap="flat" cmpd="sng" algn="ctr">
+                      <a:noFill/>
+                      <a:prstDash val="solid"/>
+                      <a:round/>
+                      <a:headEnd type="none" w="med" len="med"/>
+                      <a:tailEnd type="none" w="med" len="med"/>
+                    </a:lnT>
+                    <a:lnB w="12700" cap="flat" cmpd="sng" algn="ctr">
+                      <a:noFill/>
+                      <a:prstDash val="solid"/>
+                      <a:round/>
+                      <a:headEnd type="none" w="med" len="med"/>
+                      <a:tailEnd type="none" w="med" len="med"/>
+                    </a:lnB>
+                    <a:lnTlToBr w="12700" cmpd="sng">
+                      <a:noFill/>
+                      <a:prstDash val="solid"/>
+                    </a:lnTlToBr>
+                    <a:lnBlToTr w="12700" cmpd="sng">
+                      <a:noFill/>
+                      <a:prstDash val="solid"/>
+                    </a:lnBlToTr>
+                    <a:solidFill>
+                      <a:schemeClr val="accent6">
+                        <a:lumMod val="40000"/>
+                        <a:lumOff val="60000"/>
+                      </a:schemeClr>
+                    </a:solidFill>
+                  </a:tcPr>
+                </a:tc>
+                <a:tc>
+                  <a:txBody>
+                    <a:bodyPr/>
+                    <a:lstStyle/>
+                    <a:p>
+                      <a:endParaRPr lang="en-US" sz="1300" dirty="0"/>
+                    </a:p>
+                  </a:txBody>
+                  <a:tcPr marL="66101" marR="66101" marT="33051" marB="33051">
+                    <a:lnL w="12700" cap="flat" cmpd="sng" algn="ctr">
+                      <a:noFill/>
+                      <a:prstDash val="solid"/>
+                      <a:round/>
+                      <a:headEnd type="none" w="med" len="med"/>
+                      <a:tailEnd type="none" w="med" len="med"/>
+                    </a:lnL>
+                    <a:lnR w="28575" cap="flat" cmpd="sng" algn="ctr">
+                      <a:noFill/>
+                      <a:prstDash val="solid"/>
+                      <a:round/>
+                      <a:headEnd type="none" w="med" len="med"/>
+                      <a:tailEnd type="none" w="med" len="med"/>
+                    </a:lnR>
+                    <a:lnT w="12700" cap="flat" cmpd="sng" algn="ctr">
+                      <a:noFill/>
+                      <a:prstDash val="solid"/>
+                      <a:round/>
+                      <a:headEnd type="none" w="med" len="med"/>
+                      <a:tailEnd type="none" w="med" len="med"/>
+                    </a:lnT>
+                    <a:lnB w="12700" cmpd="sng">
+                      <a:noFill/>
+                    </a:lnB>
+                    <a:lnTlToBr w="12700" cmpd="sng">
+                      <a:noFill/>
+                      <a:prstDash val="solid"/>
+                    </a:lnTlToBr>
+                    <a:lnBlToTr w="12700" cmpd="sng">
+                      <a:noFill/>
+                      <a:prstDash val="solid"/>
+                    </a:lnBlToTr>
+                    <a:solidFill>
+                      <a:schemeClr val="accent6">
+                        <a:lumMod val="60000"/>
+                        <a:lumOff val="40000"/>
+                      </a:schemeClr>
+                    </a:solidFill>
+                  </a:tcPr>
+                </a:tc>
+                <a:extLst>
+                  <a:ext uri="{0D108BD9-81ED-4DB2-BD59-A6C34878D82A}">
+                    <a16:rowId xmlns:a16="http://schemas.microsoft.com/office/drawing/2014/main" val="1777802840"/>
+                  </a:ext>
+                </a:extLst>
+              </a:tr>
+              <a:tr h="264405">
+                <a:tc>
+                  <a:txBody>
+                    <a:bodyPr/>
+                    <a:lstStyle/>
+                    <a:p>
+                      <a:endParaRPr lang="en-US" sz="1300" dirty="0"/>
+                    </a:p>
+                  </a:txBody>
+                  <a:tcPr marL="66101" marR="66101" marT="33051" marB="33051">
+                    <a:lnL w="28575" cap="flat" cmpd="sng" algn="ctr">
+                      <a:noFill/>
+                      <a:prstDash val="solid"/>
+                      <a:round/>
+                      <a:headEnd type="none" w="med" len="med"/>
+                      <a:tailEnd type="none" w="med" len="med"/>
+                    </a:lnL>
+                    <a:lnR w="12700" cap="flat" cmpd="sng" algn="ctr">
+                      <a:noFill/>
+                      <a:prstDash val="solid"/>
+                      <a:round/>
+                      <a:headEnd type="none" w="med" len="med"/>
+                      <a:tailEnd type="none" w="med" len="med"/>
+                    </a:lnR>
+                    <a:lnT w="12700" cap="flat" cmpd="sng" algn="ctr">
+                      <a:noFill/>
+                      <a:prstDash val="solid"/>
+                      <a:round/>
+                      <a:headEnd type="none" w="med" len="med"/>
+                      <a:tailEnd type="none" w="med" len="med"/>
+                    </a:lnT>
+                    <a:lnB w="12700" cap="flat" cmpd="sng" algn="ctr">
+                      <a:noFill/>
+                      <a:prstDash val="solid"/>
+                      <a:round/>
+                      <a:headEnd type="none" w="med" len="med"/>
+                      <a:tailEnd type="none" w="med" len="med"/>
+                    </a:lnB>
+                    <a:lnTlToBr w="12700" cmpd="sng">
+                      <a:noFill/>
+                      <a:prstDash val="solid"/>
+                    </a:lnTlToBr>
+                    <a:lnBlToTr w="12700" cmpd="sng">
+                      <a:noFill/>
+                      <a:prstDash val="solid"/>
+                    </a:lnBlToTr>
+                    <a:solidFill>
+                      <a:srgbClr val="FBFBFB"/>
+                    </a:solidFill>
+                  </a:tcPr>
+                </a:tc>
+                <a:tc>
+                  <a:txBody>
+                    <a:bodyPr/>
+                    <a:lstStyle/>
+                    <a:p>
+                      <a:endParaRPr lang="en-US" sz="1300" dirty="0"/>
+                    </a:p>
+                  </a:txBody>
+                  <a:tcPr marL="66101" marR="66101" marT="33051" marB="33051">
+                    <a:lnL w="12700" cap="flat" cmpd="sng" algn="ctr">
+                      <a:noFill/>
+                      <a:prstDash val="solid"/>
+                      <a:round/>
+                      <a:headEnd type="none" w="med" len="med"/>
+                      <a:tailEnd type="none" w="med" len="med"/>
+                    </a:lnL>
+                    <a:lnR w="12700" cap="flat" cmpd="sng" algn="ctr">
+                      <a:noFill/>
+                      <a:prstDash val="solid"/>
+                      <a:round/>
+                      <a:headEnd type="none" w="med" len="med"/>
+                      <a:tailEnd type="none" w="med" len="med"/>
+                    </a:lnR>
+                    <a:lnT w="12700" cap="flat" cmpd="sng" algn="ctr">
+                      <a:noFill/>
+                      <a:prstDash val="solid"/>
+                      <a:round/>
+                      <a:headEnd type="none" w="med" len="med"/>
+                      <a:tailEnd type="none" w="med" len="med"/>
+                    </a:lnT>
+                    <a:lnB w="12700" cap="flat" cmpd="sng" algn="ctr">
+                      <a:noFill/>
+                      <a:prstDash val="solid"/>
+                      <a:round/>
+                      <a:headEnd type="none" w="med" len="med"/>
+                      <a:tailEnd type="none" w="med" len="med"/>
+                    </a:lnB>
+                    <a:lnTlToBr w="12700" cmpd="sng">
+                      <a:noFill/>
+                      <a:prstDash val="solid"/>
+                    </a:lnTlToBr>
+                    <a:lnBlToTr w="12700" cmpd="sng">
+                      <a:noFill/>
+                      <a:prstDash val="solid"/>
+                    </a:lnBlToTr>
+                    <a:solidFill>
+                      <a:srgbClr val="EDF3F0"/>
+                    </a:solidFill>
+                  </a:tcPr>
+                </a:tc>
+                <a:tc>
+                  <a:txBody>
+                    <a:bodyPr/>
+                    <a:lstStyle/>
+                    <a:p>
+                      <a:endParaRPr lang="en-US" sz="1300" dirty="0"/>
+                    </a:p>
+                  </a:txBody>
+                  <a:tcPr marL="66101" marR="66101" marT="33051" marB="33051">
+                    <a:lnL w="12700" cap="flat" cmpd="sng" algn="ctr">
+                      <a:noFill/>
+                      <a:prstDash val="solid"/>
+                      <a:round/>
+                      <a:headEnd type="none" w="med" len="med"/>
+                      <a:tailEnd type="none" w="med" len="med"/>
+                    </a:lnL>
+                    <a:lnR w="12700" cap="flat" cmpd="sng" algn="ctr">
+                      <a:noFill/>
+                      <a:prstDash val="solid"/>
+                      <a:round/>
+                      <a:headEnd type="none" w="med" len="med"/>
+                      <a:tailEnd type="none" w="med" len="med"/>
+                    </a:lnR>
+                    <a:lnT w="12700" cap="flat" cmpd="sng" algn="ctr">
+                      <a:noFill/>
+                      <a:prstDash val="solid"/>
+                      <a:round/>
+                      <a:headEnd type="none" w="med" len="med"/>
+                      <a:tailEnd type="none" w="med" len="med"/>
+                    </a:lnT>
+                    <a:lnB w="12700" cap="flat" cmpd="sng" algn="ctr">
+                      <a:noFill/>
+                      <a:prstDash val="solid"/>
+                      <a:round/>
+                      <a:headEnd type="none" w="med" len="med"/>
+                      <a:tailEnd type="none" w="med" len="med"/>
+                    </a:lnB>
+                    <a:lnTlToBr w="12700" cmpd="sng">
+                      <a:noFill/>
+                      <a:prstDash val="solid"/>
+                    </a:lnTlToBr>
+                    <a:lnBlToTr w="12700" cmpd="sng">
+                      <a:noFill/>
+                      <a:prstDash val="solid"/>
+                    </a:lnBlToTr>
+                    <a:solidFill>
+                      <a:schemeClr val="accent6">
+                        <a:lumMod val="20000"/>
+                        <a:lumOff val="80000"/>
+                      </a:schemeClr>
+                    </a:solidFill>
+                  </a:tcPr>
+                </a:tc>
+                <a:tc>
+                  <a:txBody>
+                    <a:bodyPr/>
+                    <a:lstStyle/>
+                    <a:p>
+                      <a:endParaRPr lang="en-US" sz="1300" dirty="0"/>
+                    </a:p>
+                  </a:txBody>
+                  <a:tcPr marL="66101" marR="66101" marT="33051" marB="33051">
+                    <a:lnL w="12700" cap="flat" cmpd="sng" algn="ctr">
+                      <a:noFill/>
+                      <a:prstDash val="solid"/>
+                      <a:round/>
+                      <a:headEnd type="none" w="med" len="med"/>
+                      <a:tailEnd type="none" w="med" len="med"/>
+                    </a:lnL>
+                    <a:lnR w="12700" cap="flat" cmpd="sng" algn="ctr">
+                      <a:noFill/>
+                      <a:prstDash val="solid"/>
+                      <a:round/>
+                      <a:headEnd type="none" w="med" len="med"/>
+                      <a:tailEnd type="none" w="med" len="med"/>
+                    </a:lnR>
+                    <a:lnT w="12700" cap="flat" cmpd="sng" algn="ctr">
+                      <a:noFill/>
+                      <a:prstDash val="solid"/>
+                      <a:round/>
+                      <a:headEnd type="none" w="med" len="med"/>
+                      <a:tailEnd type="none" w="med" len="med"/>
+                    </a:lnT>
+                    <a:lnB w="12700" cap="flat" cmpd="sng" algn="ctr">
+                      <a:noFill/>
+                      <a:prstDash val="solid"/>
+                      <a:round/>
+                      <a:headEnd type="none" w="med" len="med"/>
+                      <a:tailEnd type="none" w="med" len="med"/>
+                    </a:lnB>
+                    <a:lnTlToBr w="12700" cmpd="sng">
+                      <a:noFill/>
+                      <a:prstDash val="solid"/>
+                    </a:lnTlToBr>
+                    <a:lnBlToTr w="12700" cmpd="sng">
+                      <a:noFill/>
+                      <a:prstDash val="solid"/>
+                    </a:lnBlToTr>
+                    <a:solidFill>
+                      <a:schemeClr val="accent6">
+                        <a:lumMod val="40000"/>
+                        <a:lumOff val="60000"/>
+                      </a:schemeClr>
+                    </a:solidFill>
+                  </a:tcPr>
+                </a:tc>
+                <a:tc>
+                  <a:txBody>
+                    <a:bodyPr/>
+                    <a:lstStyle/>
+                    <a:p>
+                      <a:endParaRPr lang="en-US" sz="1300" dirty="0"/>
+                    </a:p>
+                  </a:txBody>
+                  <a:tcPr marL="66101" marR="66101" marT="33051" marB="33051">
+                    <a:lnL w="12700" cap="flat" cmpd="sng" algn="ctr">
+                      <a:noFill/>
+                      <a:prstDash val="solid"/>
+                      <a:round/>
+                      <a:headEnd type="none" w="med" len="med"/>
+                      <a:tailEnd type="none" w="med" len="med"/>
+                    </a:lnL>
+                    <a:lnR w="12700" cap="flat" cmpd="sng" algn="ctr">
+                      <a:noFill/>
+                      <a:prstDash val="solid"/>
+                      <a:round/>
+                      <a:headEnd type="none" w="med" len="med"/>
+                      <a:tailEnd type="none" w="med" len="med"/>
+                    </a:lnR>
+                    <a:lnT w="12700" cap="flat" cmpd="sng" algn="ctr">
+                      <a:noFill/>
+                      <a:prstDash val="solid"/>
+                      <a:round/>
+                      <a:headEnd type="none" w="med" len="med"/>
+                      <a:tailEnd type="none" w="med" len="med"/>
+                    </a:lnT>
+                    <a:lnB w="12700" cmpd="sng">
+                      <a:noFill/>
+                    </a:lnB>
+                    <a:lnTlToBr w="12700" cmpd="sng">
+                      <a:noFill/>
+                      <a:prstDash val="solid"/>
+                    </a:lnTlToBr>
+                    <a:lnBlToTr w="12700" cmpd="sng">
+                      <a:noFill/>
+                      <a:prstDash val="solid"/>
+                    </a:lnBlToTr>
+                    <a:solidFill>
+                      <a:schemeClr val="accent6">
+                        <a:lumMod val="60000"/>
+                        <a:lumOff val="40000"/>
+                      </a:schemeClr>
+                    </a:solidFill>
+                  </a:tcPr>
+                </a:tc>
+                <a:tc>
+                  <a:txBody>
+                    <a:bodyPr/>
+                    <a:lstStyle/>
+                    <a:p>
+                      <a:endParaRPr lang="en-US" sz="1300" dirty="0"/>
+                    </a:p>
+                  </a:txBody>
+                  <a:tcPr marL="66101" marR="66101" marT="33051" marB="33051">
+                    <a:lnL w="12700" cap="flat" cmpd="sng" algn="ctr">
+                      <a:noFill/>
+                      <a:prstDash val="solid"/>
+                      <a:round/>
+                      <a:headEnd type="none" w="med" len="med"/>
+                      <a:tailEnd type="none" w="med" len="med"/>
+                    </a:lnL>
+                    <a:lnR w="28575" cap="flat" cmpd="sng" algn="ctr">
+                      <a:noFill/>
+                      <a:prstDash val="solid"/>
+                      <a:round/>
+                      <a:headEnd type="none" w="med" len="med"/>
+                      <a:tailEnd type="none" w="med" len="med"/>
+                    </a:lnR>
+                    <a:lnT w="12700" cmpd="sng">
+                      <a:noFill/>
+                    </a:lnT>
+                    <a:lnB w="12700" cmpd="sng">
+                      <a:noFill/>
+                    </a:lnB>
+                    <a:lnTlToBr w="12700" cmpd="sng">
+                      <a:noFill/>
+                      <a:prstDash val="solid"/>
+                    </a:lnTlToBr>
+                    <a:lnBlToTr w="12700" cmpd="sng">
+                      <a:noFill/>
+                      <a:prstDash val="solid"/>
+                    </a:lnBlToTr>
+                    <a:solidFill>
+                      <a:schemeClr val="accent6">
+                        <a:lumMod val="75000"/>
+                      </a:schemeClr>
+                    </a:solidFill>
+                  </a:tcPr>
+                </a:tc>
+                <a:extLst>
+                  <a:ext uri="{0D108BD9-81ED-4DB2-BD59-A6C34878D82A}">
+                    <a16:rowId xmlns:a16="http://schemas.microsoft.com/office/drawing/2014/main" val="2164492720"/>
+                  </a:ext>
+                </a:extLst>
+              </a:tr>
+              <a:tr h="264405">
+                <a:tc>
+                  <a:txBody>
+                    <a:bodyPr/>
+                    <a:lstStyle/>
+                    <a:p>
+                      <a:endParaRPr lang="en-US" sz="1300" dirty="0"/>
+                    </a:p>
+                  </a:txBody>
+                  <a:tcPr marL="66101" marR="66101" marT="33051" marB="33051">
+                    <a:lnL w="28575" cap="flat" cmpd="sng" algn="ctr">
+                      <a:noFill/>
+                      <a:prstDash val="solid"/>
+                      <a:round/>
+                      <a:headEnd type="none" w="med" len="med"/>
+                      <a:tailEnd type="none" w="med" len="med"/>
+                    </a:lnL>
+                    <a:lnR w="12700" cap="flat" cmpd="sng" algn="ctr">
+                      <a:noFill/>
+                      <a:prstDash val="solid"/>
+                      <a:round/>
+                      <a:headEnd type="none" w="med" len="med"/>
+                      <a:tailEnd type="none" w="med" len="med"/>
+                    </a:lnR>
+                    <a:lnT w="12700" cap="flat" cmpd="sng" algn="ctr">
+                      <a:noFill/>
+                      <a:prstDash val="solid"/>
+                      <a:round/>
+                      <a:headEnd type="none" w="med" len="med"/>
+                      <a:tailEnd type="none" w="med" len="med"/>
+                    </a:lnT>
+                    <a:lnB w="12700" cap="flat" cmpd="sng" algn="ctr">
+                      <a:noFill/>
+                      <a:prstDash val="solid"/>
+                      <a:round/>
+                      <a:headEnd type="none" w="med" len="med"/>
+                      <a:tailEnd type="none" w="med" len="med"/>
+                    </a:lnB>
+                    <a:lnTlToBr w="12700" cmpd="sng">
+                      <a:noFill/>
+                      <a:prstDash val="solid"/>
+                    </a:lnTlToBr>
+                    <a:lnBlToTr w="12700" cmpd="sng">
+                      <a:noFill/>
+                      <a:prstDash val="solid"/>
+                    </a:lnBlToTr>
+                    <a:solidFill>
+                      <a:srgbClr val="EDF3F0"/>
+                    </a:solidFill>
+                  </a:tcPr>
+                </a:tc>
+                <a:tc>
+                  <a:txBody>
+                    <a:bodyPr/>
+                    <a:lstStyle/>
+                    <a:p>
+                      <a:endParaRPr lang="en-US" sz="1300" dirty="0"/>
+                    </a:p>
+                  </a:txBody>
+                  <a:tcPr marL="66101" marR="66101" marT="33051" marB="33051">
+                    <a:lnL w="12700" cap="flat" cmpd="sng" algn="ctr">
+                      <a:noFill/>
+                      <a:prstDash val="solid"/>
+                      <a:round/>
+                      <a:headEnd type="none" w="med" len="med"/>
+                      <a:tailEnd type="none" w="med" len="med"/>
+                    </a:lnL>
+                    <a:lnR w="12700" cap="flat" cmpd="sng" algn="ctr">
+                      <a:noFill/>
+                      <a:prstDash val="solid"/>
+                      <a:round/>
+                      <a:headEnd type="none" w="med" len="med"/>
+                      <a:tailEnd type="none" w="med" len="med"/>
+                    </a:lnR>
+                    <a:lnT w="12700" cap="flat" cmpd="sng" algn="ctr">
+                      <a:noFill/>
+                      <a:prstDash val="solid"/>
+                      <a:round/>
+                      <a:headEnd type="none" w="med" len="med"/>
+                      <a:tailEnd type="none" w="med" len="med"/>
+                    </a:lnT>
+                    <a:lnB w="12700" cap="flat" cmpd="sng" algn="ctr">
+                      <a:noFill/>
+                      <a:prstDash val="solid"/>
+                      <a:round/>
+                      <a:headEnd type="none" w="med" len="med"/>
+                      <a:tailEnd type="none" w="med" len="med"/>
+                    </a:lnB>
+                    <a:lnTlToBr w="12700" cmpd="sng">
+                      <a:noFill/>
+                      <a:prstDash val="solid"/>
+                    </a:lnTlToBr>
+                    <a:lnBlToTr w="12700" cmpd="sng">
+                      <a:noFill/>
+                      <a:prstDash val="solid"/>
+                    </a:lnBlToTr>
+                    <a:solidFill>
+                      <a:schemeClr val="accent6">
+                        <a:lumMod val="20000"/>
+                        <a:lumOff val="80000"/>
+                      </a:schemeClr>
+                    </a:solidFill>
+                  </a:tcPr>
+                </a:tc>
+                <a:tc>
+                  <a:txBody>
+                    <a:bodyPr/>
+                    <a:lstStyle/>
+                    <a:p>
+                      <a:endParaRPr lang="en-US" sz="1300" dirty="0"/>
+                    </a:p>
+                  </a:txBody>
+                  <a:tcPr marL="66101" marR="66101" marT="33051" marB="33051">
+                    <a:lnL w="12700" cap="flat" cmpd="sng" algn="ctr">
+                      <a:noFill/>
+                      <a:prstDash val="solid"/>
+                      <a:round/>
+                      <a:headEnd type="none" w="med" len="med"/>
+                      <a:tailEnd type="none" w="med" len="med"/>
+                    </a:lnL>
+                    <a:lnR w="12700" cap="flat" cmpd="sng" algn="ctr">
+                      <a:noFill/>
+                      <a:prstDash val="solid"/>
+                      <a:round/>
+                      <a:headEnd type="none" w="med" len="med"/>
+                      <a:tailEnd type="none" w="med" len="med"/>
+                    </a:lnR>
+                    <a:lnT w="12700" cap="flat" cmpd="sng" algn="ctr">
+                      <a:noFill/>
+                      <a:prstDash val="solid"/>
+                      <a:round/>
+                      <a:headEnd type="none" w="med" len="med"/>
+                      <a:tailEnd type="none" w="med" len="med"/>
+                    </a:lnT>
+                    <a:lnB w="12700" cap="flat" cmpd="sng" algn="ctr">
+                      <a:noFill/>
+                      <a:prstDash val="solid"/>
+                      <a:round/>
+                      <a:headEnd type="none" w="med" len="med"/>
+                      <a:tailEnd type="none" w="med" len="med"/>
+                    </a:lnB>
+                    <a:lnTlToBr w="12700" cmpd="sng">
+                      <a:noFill/>
+                      <a:prstDash val="solid"/>
+                    </a:lnTlToBr>
+                    <a:lnBlToTr w="12700" cmpd="sng">
+                      <a:noFill/>
+                      <a:prstDash val="solid"/>
+                    </a:lnBlToTr>
+                    <a:solidFill>
+                      <a:schemeClr val="accent6">
+                        <a:lumMod val="40000"/>
+                        <a:lumOff val="60000"/>
+                      </a:schemeClr>
+                    </a:solidFill>
+                  </a:tcPr>
+                </a:tc>
+                <a:tc>
+                  <a:txBody>
+                    <a:bodyPr/>
+                    <a:lstStyle/>
+                    <a:p>
+                      <a:endParaRPr lang="en-US" sz="1300" dirty="0"/>
+                    </a:p>
+                  </a:txBody>
+                  <a:tcPr marL="66101" marR="66101" marT="33051" marB="33051">
+                    <a:lnL w="12700" cap="flat" cmpd="sng" algn="ctr">
+                      <a:noFill/>
+                      <a:prstDash val="solid"/>
+                      <a:round/>
+                      <a:headEnd type="none" w="med" len="med"/>
+                      <a:tailEnd type="none" w="med" len="med"/>
+                    </a:lnL>
+                    <a:lnR w="12700" cmpd="sng">
+                      <a:noFill/>
+                    </a:lnR>
+                    <a:lnT w="12700" cap="flat" cmpd="sng" algn="ctr">
+                      <a:noFill/>
+                      <a:prstDash val="solid"/>
+                      <a:round/>
+                      <a:headEnd type="none" w="med" len="med"/>
+                      <a:tailEnd type="none" w="med" len="med"/>
+                    </a:lnT>
+                    <a:lnB w="12700" cmpd="sng">
+                      <a:noFill/>
+                    </a:lnB>
+                    <a:lnTlToBr w="12700" cmpd="sng">
+                      <a:noFill/>
+                      <a:prstDash val="solid"/>
+                    </a:lnTlToBr>
+                    <a:lnBlToTr w="12700" cmpd="sng">
+                      <a:noFill/>
+                      <a:prstDash val="solid"/>
+                    </a:lnBlToTr>
+                    <a:solidFill>
+                      <a:schemeClr val="accent6">
+                        <a:lumMod val="60000"/>
+                        <a:lumOff val="40000"/>
+                      </a:schemeClr>
+                    </a:solidFill>
+                  </a:tcPr>
+                </a:tc>
+                <a:tc>
+                  <a:txBody>
+                    <a:bodyPr/>
+                    <a:lstStyle/>
+                    <a:p>
+                      <a:endParaRPr lang="en-US" sz="1300" dirty="0"/>
+                    </a:p>
+                  </a:txBody>
+                  <a:tcPr marL="66101" marR="66101" marT="33051" marB="33051">
+                    <a:lnL w="12700" cmpd="sng">
+                      <a:noFill/>
+                    </a:lnL>
+                    <a:lnR w="12700" cap="flat" cmpd="sng" algn="ctr">
+                      <a:noFill/>
+                      <a:prstDash val="solid"/>
+                      <a:round/>
+                      <a:headEnd type="none" w="med" len="med"/>
+                      <a:tailEnd type="none" w="med" len="med"/>
+                    </a:lnR>
+                    <a:lnT w="12700" cmpd="sng">
+                      <a:noFill/>
+                    </a:lnT>
+                    <a:lnB w="12700" cmpd="sng">
+                      <a:noFill/>
+                    </a:lnB>
+                    <a:lnTlToBr w="12700" cmpd="sng">
+                      <a:noFill/>
+                      <a:prstDash val="solid"/>
+                    </a:lnTlToBr>
+                    <a:lnBlToTr w="12700" cmpd="sng">
+                      <a:noFill/>
+                      <a:prstDash val="solid"/>
+                    </a:lnBlToTr>
+                    <a:solidFill>
+                      <a:schemeClr val="accent6">
+                        <a:lumMod val="75000"/>
+                      </a:schemeClr>
+                    </a:solidFill>
+                  </a:tcPr>
+                </a:tc>
+                <a:tc>
+                  <a:txBody>
+                    <a:bodyPr/>
+                    <a:lstStyle/>
+                    <a:p>
+                      <a:endParaRPr lang="en-US" sz="1300" dirty="0"/>
+                    </a:p>
+                  </a:txBody>
+                  <a:tcPr marL="66101" marR="66101" marT="33051" marB="33051">
+                    <a:lnL w="12700" cap="flat" cmpd="sng" algn="ctr">
+                      <a:noFill/>
+                      <a:prstDash val="solid"/>
+                      <a:round/>
+                      <a:headEnd type="none" w="med" len="med"/>
+                      <a:tailEnd type="none" w="med" len="med"/>
+                    </a:lnL>
+                    <a:lnR w="28575" cap="flat" cmpd="sng" algn="ctr">
+                      <a:noFill/>
+                      <a:prstDash val="solid"/>
+                      <a:round/>
+                      <a:headEnd type="none" w="med" len="med"/>
+                      <a:tailEnd type="none" w="med" len="med"/>
+                    </a:lnR>
+                    <a:lnT w="12700" cmpd="sng">
+                      <a:noFill/>
+                    </a:lnT>
+                    <a:lnB w="12700" cmpd="sng">
+                      <a:noFill/>
+                    </a:lnB>
+                    <a:lnTlToBr w="12700" cmpd="sng">
+                      <a:noFill/>
+                      <a:prstDash val="solid"/>
+                    </a:lnTlToBr>
+                    <a:lnBlToTr w="12700" cmpd="sng">
+                      <a:noFill/>
+                      <a:prstDash val="solid"/>
+                    </a:lnBlToTr>
+                    <a:solidFill>
+                      <a:schemeClr val="accent6">
+                        <a:lumMod val="75000"/>
+                      </a:schemeClr>
+                    </a:solidFill>
+                  </a:tcPr>
+                </a:tc>
+                <a:extLst>
+                  <a:ext uri="{0D108BD9-81ED-4DB2-BD59-A6C34878D82A}">
+                    <a16:rowId xmlns:a16="http://schemas.microsoft.com/office/drawing/2014/main" val="4197694604"/>
+                  </a:ext>
+                </a:extLst>
+              </a:tr>
+              <a:tr h="264405">
+                <a:tc>
+                  <a:txBody>
+                    <a:bodyPr/>
+                    <a:lstStyle/>
+                    <a:p>
+                      <a:endParaRPr lang="en-US" sz="1300" dirty="0"/>
+                    </a:p>
+                  </a:txBody>
+                  <a:tcPr marL="66101" marR="66101" marT="33051" marB="33051">
+                    <a:lnL w="28575" cap="flat" cmpd="sng" algn="ctr">
+                      <a:noFill/>
+                      <a:prstDash val="solid"/>
+                      <a:round/>
+                      <a:headEnd type="none" w="med" len="med"/>
+                      <a:tailEnd type="none" w="med" len="med"/>
+                    </a:lnL>
+                    <a:lnR w="12700" cap="flat" cmpd="sng" algn="ctr">
+                      <a:noFill/>
+                      <a:prstDash val="solid"/>
+                      <a:round/>
+                      <a:headEnd type="none" w="med" len="med"/>
+                      <a:tailEnd type="none" w="med" len="med"/>
+                    </a:lnR>
+                    <a:lnT w="12700" cap="flat" cmpd="sng" algn="ctr">
+                      <a:noFill/>
+                      <a:prstDash val="solid"/>
+                      <a:round/>
+                      <a:headEnd type="none" w="med" len="med"/>
+                      <a:tailEnd type="none" w="med" len="med"/>
+                    </a:lnT>
+                    <a:lnB w="28575" cap="flat" cmpd="sng" algn="ctr">
+                      <a:noFill/>
+                      <a:prstDash val="solid"/>
+                      <a:round/>
+                      <a:headEnd type="none" w="med" len="med"/>
+                      <a:tailEnd type="none" w="med" len="med"/>
+                    </a:lnB>
+                    <a:lnTlToBr w="12700" cmpd="sng">
+                      <a:noFill/>
+                      <a:prstDash val="solid"/>
+                    </a:lnTlToBr>
+                    <a:lnBlToTr w="12700" cmpd="sng">
+                      <a:noFill/>
+                      <a:prstDash val="solid"/>
+                    </a:lnBlToTr>
+                    <a:solidFill>
+                      <a:schemeClr val="accent6">
+                        <a:lumMod val="20000"/>
+                        <a:lumOff val="80000"/>
+                      </a:schemeClr>
+                    </a:solidFill>
+                  </a:tcPr>
+                </a:tc>
+                <a:tc>
+                  <a:txBody>
+                    <a:bodyPr/>
+                    <a:lstStyle/>
+                    <a:p>
+                      <a:endParaRPr lang="en-US" sz="1300" dirty="0"/>
+                    </a:p>
+                  </a:txBody>
+                  <a:tcPr marL="66101" marR="66101" marT="33051" marB="33051">
+                    <a:lnL w="12700" cap="flat" cmpd="sng" algn="ctr">
+                      <a:noFill/>
+                      <a:prstDash val="solid"/>
+                      <a:round/>
+                      <a:headEnd type="none" w="med" len="med"/>
+                      <a:tailEnd type="none" w="med" len="med"/>
+                    </a:lnL>
+                    <a:lnR w="12700" cap="flat" cmpd="sng" algn="ctr">
+                      <a:noFill/>
+                      <a:prstDash val="solid"/>
+                      <a:round/>
+                      <a:headEnd type="none" w="med" len="med"/>
+                      <a:tailEnd type="none" w="med" len="med"/>
+                    </a:lnR>
+                    <a:lnT w="12700" cap="flat" cmpd="sng" algn="ctr">
+                      <a:noFill/>
+                      <a:prstDash val="solid"/>
+                      <a:round/>
+                      <a:headEnd type="none" w="med" len="med"/>
+                      <a:tailEnd type="none" w="med" len="med"/>
+                    </a:lnT>
+                    <a:lnB w="28575" cap="flat" cmpd="sng" algn="ctr">
+                      <a:noFill/>
+                      <a:prstDash val="solid"/>
+                      <a:round/>
+                      <a:headEnd type="none" w="med" len="med"/>
+                      <a:tailEnd type="none" w="med" len="med"/>
+                    </a:lnB>
+                    <a:lnTlToBr w="12700" cmpd="sng">
+                      <a:noFill/>
+                      <a:prstDash val="solid"/>
+                    </a:lnTlToBr>
+                    <a:lnBlToTr w="12700" cmpd="sng">
+                      <a:noFill/>
+                      <a:prstDash val="solid"/>
+                    </a:lnBlToTr>
+                    <a:solidFill>
+                      <a:schemeClr val="accent6">
+                        <a:lumMod val="40000"/>
+                        <a:lumOff val="60000"/>
+                      </a:schemeClr>
+                    </a:solidFill>
+                  </a:tcPr>
+                </a:tc>
+                <a:tc>
+                  <a:txBody>
+                    <a:bodyPr/>
+                    <a:lstStyle/>
+                    <a:p>
+                      <a:endParaRPr lang="en-US" sz="1300" dirty="0"/>
+                    </a:p>
+                  </a:txBody>
+                  <a:tcPr marL="66101" marR="66101" marT="33051" marB="33051">
+                    <a:lnL w="12700" cap="flat" cmpd="sng" algn="ctr">
+                      <a:noFill/>
+                      <a:prstDash val="solid"/>
+                      <a:round/>
+                      <a:headEnd type="none" w="med" len="med"/>
+                      <a:tailEnd type="none" w="med" len="med"/>
+                    </a:lnL>
+                    <a:lnR w="12700" cmpd="sng">
+                      <a:noFill/>
+                    </a:lnR>
+                    <a:lnT w="12700" cap="flat" cmpd="sng" algn="ctr">
+                      <a:noFill/>
+                      <a:prstDash val="solid"/>
+                      <a:round/>
+                      <a:headEnd type="none" w="med" len="med"/>
+                      <a:tailEnd type="none" w="med" len="med"/>
+                    </a:lnT>
+                    <a:lnB w="28575" cap="flat" cmpd="sng" algn="ctr">
+                      <a:noFill/>
+                      <a:prstDash val="solid"/>
+                      <a:round/>
+                      <a:headEnd type="none" w="med" len="med"/>
+                      <a:tailEnd type="none" w="med" len="med"/>
+                    </a:lnB>
+                    <a:lnTlToBr w="12700" cmpd="sng">
+                      <a:noFill/>
+                      <a:prstDash val="solid"/>
+                    </a:lnTlToBr>
+                    <a:lnBlToTr w="12700" cmpd="sng">
+                      <a:noFill/>
+                      <a:prstDash val="solid"/>
+                    </a:lnBlToTr>
+                    <a:solidFill>
+                      <a:schemeClr val="accent6">
+                        <a:lumMod val="60000"/>
+                        <a:lumOff val="40000"/>
+                      </a:schemeClr>
+                    </a:solidFill>
+                  </a:tcPr>
+                </a:tc>
+                <a:tc>
+                  <a:txBody>
+                    <a:bodyPr/>
+                    <a:lstStyle/>
+                    <a:p>
+                      <a:endParaRPr lang="en-US" sz="1300" dirty="0"/>
+                    </a:p>
+                  </a:txBody>
+                  <a:tcPr marL="66101" marR="66101" marT="33051" marB="33051">
+                    <a:lnL w="12700" cmpd="sng">
+                      <a:noFill/>
+                    </a:lnL>
+                    <a:lnR w="12700" cmpd="sng">
+                      <a:noFill/>
+                    </a:lnR>
+                    <a:lnT w="12700" cmpd="sng">
+                      <a:noFill/>
+                    </a:lnT>
+                    <a:lnB w="28575" cap="flat" cmpd="sng" algn="ctr">
+                      <a:noFill/>
+                      <a:prstDash val="solid"/>
+                      <a:round/>
+                      <a:headEnd type="none" w="med" len="med"/>
+                      <a:tailEnd type="none" w="med" len="med"/>
+                    </a:lnB>
+                    <a:lnTlToBr w="12700" cmpd="sng">
+                      <a:noFill/>
+                      <a:prstDash val="solid"/>
+                    </a:lnTlToBr>
+                    <a:lnBlToTr w="12700" cmpd="sng">
+                      <a:noFill/>
+                      <a:prstDash val="solid"/>
+                    </a:lnBlToTr>
+                    <a:solidFill>
+                      <a:schemeClr val="accent6">
+                        <a:lumMod val="75000"/>
+                      </a:schemeClr>
+                    </a:solidFill>
+                  </a:tcPr>
+                </a:tc>
+                <a:tc>
+                  <a:txBody>
+                    <a:bodyPr/>
+                    <a:lstStyle/>
+                    <a:p>
+                      <a:endParaRPr lang="en-US" sz="1300" dirty="0"/>
+                    </a:p>
+                  </a:txBody>
+                  <a:tcPr marL="66101" marR="66101" marT="33051" marB="33051">
+                    <a:lnL w="12700" cmpd="sng">
+                      <a:noFill/>
+                    </a:lnL>
+                    <a:lnR w="12700" cmpd="sng">
+                      <a:noFill/>
+                    </a:lnR>
+                    <a:lnT w="12700" cmpd="sng">
+                      <a:noFill/>
+                    </a:lnT>
+                    <a:lnB w="28575" cap="flat" cmpd="sng" algn="ctr">
+                      <a:noFill/>
+                      <a:prstDash val="solid"/>
+                      <a:round/>
+                      <a:headEnd type="none" w="med" len="med"/>
+                      <a:tailEnd type="none" w="med" len="med"/>
+                    </a:lnB>
+                    <a:lnTlToBr w="12700" cmpd="sng">
+                      <a:noFill/>
+                      <a:prstDash val="solid"/>
+                    </a:lnTlToBr>
+                    <a:lnBlToTr w="12700" cmpd="sng">
+                      <a:noFill/>
+                      <a:prstDash val="solid"/>
+                    </a:lnBlToTr>
+                    <a:solidFill>
+                      <a:schemeClr val="accent6">
+                        <a:lumMod val="75000"/>
+                      </a:schemeClr>
+                    </a:solidFill>
+                  </a:tcPr>
+                </a:tc>
+                <a:tc>
+                  <a:txBody>
+                    <a:bodyPr/>
+                    <a:lstStyle/>
+                    <a:p>
+                      <a:endParaRPr lang="en-US" sz="1300" dirty="0"/>
+                    </a:p>
+                  </a:txBody>
+                  <a:tcPr marL="66101" marR="66101" marT="33051" marB="33051">
+                    <a:lnL w="12700" cmpd="sng">
+                      <a:noFill/>
+                    </a:lnL>
+                    <a:lnR w="28575" cap="flat" cmpd="sng" algn="ctr">
+                      <a:noFill/>
+                      <a:prstDash val="solid"/>
+                      <a:round/>
+                      <a:headEnd type="none" w="med" len="med"/>
+                      <a:tailEnd type="none" w="med" len="med"/>
+                    </a:lnR>
+                    <a:lnT w="12700" cmpd="sng">
+                      <a:noFill/>
+                    </a:lnT>
+                    <a:lnB w="28575" cap="flat" cmpd="sng" algn="ctr">
+                      <a:noFill/>
+                      <a:prstDash val="solid"/>
+                      <a:round/>
+                      <a:headEnd type="none" w="med" len="med"/>
+                      <a:tailEnd type="none" w="med" len="med"/>
+                    </a:lnB>
+                    <a:lnTlToBr w="12700" cmpd="sng">
+                      <a:noFill/>
+                      <a:prstDash val="solid"/>
+                    </a:lnTlToBr>
+                    <a:lnBlToTr w="12700" cmpd="sng">
+                      <a:noFill/>
+                      <a:prstDash val="solid"/>
+                    </a:lnBlToTr>
+                    <a:solidFill>
+                      <a:schemeClr val="accent6">
+                        <a:lumMod val="50000"/>
+                      </a:schemeClr>
+                    </a:solidFill>
+                  </a:tcPr>
+                </a:tc>
+                <a:extLst>
+                  <a:ext uri="{0D108BD9-81ED-4DB2-BD59-A6C34878D82A}">
+                    <a16:rowId xmlns:a16="http://schemas.microsoft.com/office/drawing/2014/main" val="1423203850"/>
+                  </a:ext>
+                </a:extLst>
+              </a:tr>
+            </a:tbl>
+          </a:graphicData>
+        </a:graphic>
+      </p:graphicFrame>
     </p:spTree>
     <p:extLst>
       <p:ext uri="{BB962C8B-B14F-4D97-AF65-F5344CB8AC3E}">
